--- a/QUIC-HTTP3-in-DotNET.pptx
+++ b/QUIC-HTTP3-in-DotNET.pptx
@@ -10,9 +10,9 @@
   <p:sldIdLst>
     <p:sldId id="282" r:id="rId2"/>
     <p:sldId id="256" r:id="rId3"/>
-    <p:sldId id="257" r:id="rId4"/>
-    <p:sldId id="258" r:id="rId5"/>
-    <p:sldId id="283" r:id="rId6"/>
+    <p:sldId id="283" r:id="rId4"/>
+    <p:sldId id="257" r:id="rId5"/>
+    <p:sldId id="258" r:id="rId6"/>
     <p:sldId id="259" r:id="rId7"/>
     <p:sldId id="260" r:id="rId8"/>
     <p:sldId id="261" r:id="rId9"/>
@@ -19219,6 +19219,583 @@
 
 <file path=ppt/slides/slide3.xml><?xml version="1.0" encoding="utf-8"?>
 <p:sld xmlns:a="http://schemas.openxmlformats.org/drawingml/2006/main" xmlns:r="http://schemas.openxmlformats.org/officeDocument/2006/relationships" xmlns:p="http://schemas.openxmlformats.org/presentationml/2006/main">
+  <p:cSld>
+    <p:spTree>
+      <p:nvGrpSpPr>
+        <p:cNvPr id="1" name=""/>
+        <p:cNvGrpSpPr/>
+        <p:nvPr/>
+      </p:nvGrpSpPr>
+      <p:grpSpPr>
+        <a:xfrm>
+          <a:off x="0" y="0"/>
+          <a:ext cx="0" cy="0"/>
+          <a:chOff x="0" y="0"/>
+          <a:chExt cx="0" cy="0"/>
+        </a:xfrm>
+      </p:grpSpPr>
+      <p:sp>
+        <p:nvSpPr>
+          <p:cNvPr id="2" name="Text 0"/>
+          <p:cNvSpPr/>
+          <p:nvPr/>
+        </p:nvSpPr>
+        <p:spPr>
+          <a:xfrm>
+            <a:off x="457200" y="274320"/>
+            <a:ext cx="8229600" cy="256032"/>
+          </a:xfrm>
+          <a:prstGeom prst="rect">
+            <a:avLst/>
+          </a:prstGeom>
+          <a:noFill/>
+          <a:ln/>
+        </p:spPr>
+        <p:txBody>
+          <a:bodyPr wrap="square" lIns="0" tIns="0" rIns="0" bIns="0" rtlCol="0" anchor="ctr"/>
+          <a:lstStyle/>
+          <a:p>
+            <a:pPr marL="0" indent="0">
+              <a:buNone/>
+            </a:pPr>
+            <a:r>
+              <a:rPr lang="en-US" sz="1000" b="1" kern="0" spc="400" dirty="0">
+                <a:solidFill>
+                  <a:srgbClr val="06B6D4"/>
+                </a:solidFill>
+                <a:latin typeface="Calibri" pitchFamily="34" charset="0"/>
+                <a:ea typeface="Calibri" pitchFamily="34" charset="-122"/>
+                <a:cs typeface="Calibri" pitchFamily="34" charset="-120"/>
+              </a:rPr>
+              <a:t>FROM THE AUTHOR</a:t>
+            </a:r>
+            <a:endParaRPr lang="en-US" sz="1000" dirty="0"/>
+          </a:p>
+        </p:txBody>
+      </p:sp>
+      <p:sp>
+        <p:nvSpPr>
+          <p:cNvPr id="3" name="Text 1"/>
+          <p:cNvSpPr/>
+          <p:nvPr/>
+        </p:nvSpPr>
+        <p:spPr>
+          <a:xfrm>
+            <a:off x="457200" y="502920"/>
+            <a:ext cx="8229600" cy="640080"/>
+          </a:xfrm>
+          <a:prstGeom prst="rect">
+            <a:avLst/>
+          </a:prstGeom>
+          <a:noFill/>
+          <a:ln/>
+        </p:spPr>
+        <p:txBody>
+          <a:bodyPr wrap="square" lIns="0" tIns="0" rIns="0" bIns="0" rtlCol="0" anchor="ctr"/>
+          <a:lstStyle/>
+          <a:p>
+            <a:pPr marL="0" indent="0">
+              <a:buNone/>
+            </a:pPr>
+            <a:r>
+              <a:rPr lang="en-US" sz="3000" b="1" dirty="0">
+                <a:solidFill>
+                  <a:srgbClr val="0B1426"/>
+                </a:solidFill>
+                <a:latin typeface="Calibri" pitchFamily="34" charset="0"/>
+                <a:ea typeface="Calibri" pitchFamily="34" charset="-122"/>
+                <a:cs typeface="Calibri" pitchFamily="34" charset="-120"/>
+              </a:rPr>
+              <a:t>I wrote the book on this.</a:t>
+            </a:r>
+            <a:endParaRPr lang="en-US" sz="3000" dirty="0"/>
+          </a:p>
+        </p:txBody>
+      </p:sp>
+      <p:pic>
+        <p:nvPicPr>
+          <p:cNvPr id="4" name="Image 0" descr="cover-resized.jpeg"/>
+          <p:cNvPicPr>
+            <a:picLocks noChangeAspect="1"/>
+          </p:cNvPicPr>
+          <p:nvPr/>
+        </p:nvPicPr>
+        <p:blipFill>
+          <a:blip r:embed="rId3"/>
+          <a:srcRect/>
+          <a:stretch/>
+        </p:blipFill>
+        <p:spPr>
+          <a:xfrm>
+            <a:off x="640080" y="1325880"/>
+            <a:ext cx="2194560" cy="3291840"/>
+          </a:xfrm>
+          <a:prstGeom prst="rect">
+            <a:avLst/>
+          </a:prstGeom>
+        </p:spPr>
+      </p:pic>
+      <p:sp>
+        <p:nvSpPr>
+          <p:cNvPr id="5" name="Text 2"/>
+          <p:cNvSpPr/>
+          <p:nvPr/>
+        </p:nvSpPr>
+        <p:spPr>
+          <a:xfrm>
+            <a:off x="3291840" y="1325880"/>
+            <a:ext cx="5486400" cy="502920"/>
+          </a:xfrm>
+          <a:prstGeom prst="rect">
+            <a:avLst/>
+          </a:prstGeom>
+          <a:noFill/>
+          <a:ln/>
+        </p:spPr>
+        <p:txBody>
+          <a:bodyPr wrap="square" lIns="0" tIns="0" rIns="0" bIns="0" rtlCol="0" anchor="ctr"/>
+          <a:lstStyle/>
+          <a:p>
+            <a:pPr marL="0" indent="0">
+              <a:buNone/>
+            </a:pPr>
+            <a:r>
+              <a:rPr lang="en-US" sz="2600" b="1" dirty="0">
+                <a:solidFill>
+                  <a:srgbClr val="0B1426"/>
+                </a:solidFill>
+                <a:latin typeface="Calibri" pitchFamily="34" charset="0"/>
+                <a:ea typeface="Calibri" pitchFamily="34" charset="-122"/>
+                <a:cs typeface="Calibri" pitchFamily="34" charset="-120"/>
+              </a:rPr>
+              <a:t>Beyond Boundaries</a:t>
+            </a:r>
+            <a:endParaRPr lang="en-US" sz="2600" dirty="0"/>
+          </a:p>
+        </p:txBody>
+      </p:sp>
+      <p:sp>
+        <p:nvSpPr>
+          <p:cNvPr id="6" name="Text 3"/>
+          <p:cNvSpPr/>
+          <p:nvPr/>
+        </p:nvSpPr>
+        <p:spPr>
+          <a:xfrm>
+            <a:off x="3291840" y="1828800"/>
+            <a:ext cx="5486400" cy="365760"/>
+          </a:xfrm>
+          <a:prstGeom prst="rect">
+            <a:avLst/>
+          </a:prstGeom>
+          <a:noFill/>
+          <a:ln/>
+        </p:spPr>
+        <p:txBody>
+          <a:bodyPr wrap="square" lIns="0" tIns="0" rIns="0" bIns="0" rtlCol="0" anchor="ctr"/>
+          <a:lstStyle/>
+          <a:p>
+            <a:pPr marL="0" indent="0">
+              <a:buNone/>
+            </a:pPr>
+            <a:r>
+              <a:rPr lang="en-US" sz="1400" i="1" dirty="0">
+                <a:solidFill>
+                  <a:srgbClr val="0E7490"/>
+                </a:solidFill>
+                <a:latin typeface="Calibri" pitchFamily="34" charset="0"/>
+                <a:ea typeface="Calibri" pitchFamily="34" charset="-122"/>
+                <a:cs typeface="Calibri" pitchFamily="34" charset="-120"/>
+              </a:rPr>
+              <a:t>Networking Programming with C# 12 and .NET 8</a:t>
+            </a:r>
+            <a:endParaRPr lang="en-US" sz="1400" dirty="0"/>
+          </a:p>
+        </p:txBody>
+      </p:sp>
+      <p:sp>
+        <p:nvSpPr>
+          <p:cNvPr id="7" name="Text 4"/>
+          <p:cNvSpPr/>
+          <p:nvPr/>
+        </p:nvSpPr>
+        <p:spPr>
+          <a:xfrm>
+            <a:off x="3291840" y="2331720"/>
+            <a:ext cx="5486400" cy="1188720"/>
+          </a:xfrm>
+          <a:prstGeom prst="rect">
+            <a:avLst/>
+          </a:prstGeom>
+          <a:noFill/>
+          <a:ln/>
+        </p:spPr>
+        <p:txBody>
+          <a:bodyPr wrap="square" lIns="0" tIns="0" rIns="0" bIns="0" rtlCol="0" anchor="ctr"/>
+          <a:lstStyle/>
+          <a:p>
+            <a:pPr marL="0" indent="0">
+              <a:buNone/>
+            </a:pPr>
+            <a:r>
+              <a:rPr lang="en-US" sz="1200" dirty="0">
+                <a:solidFill>
+                  <a:srgbClr val="64748B"/>
+                </a:solidFill>
+                <a:latin typeface="Calibri" pitchFamily="34" charset="0"/>
+                <a:ea typeface="Calibri" pitchFamily="34" charset="-122"/>
+                <a:cs typeface="Calibri" pitchFamily="34" charset="-120"/>
+              </a:rPr>
+              <a:t>A full tour of network programming in modern .NET — sockets, HTTP, WebSockets, gRPC, SignalR, MQTT, and the complete QUIC and HTTP/3 story behind today's talk.</a:t>
+            </a:r>
+            <a:endParaRPr lang="en-US" sz="1200" dirty="0"/>
+          </a:p>
+        </p:txBody>
+      </p:sp>
+      <p:sp>
+        <p:nvSpPr>
+          <p:cNvPr id="8" name="Shape 5"/>
+          <p:cNvSpPr/>
+          <p:nvPr/>
+        </p:nvSpPr>
+        <p:spPr>
+          <a:xfrm>
+            <a:off x="3291840" y="3520440"/>
+            <a:ext cx="5486400" cy="594360"/>
+          </a:xfrm>
+          <a:prstGeom prst="rect">
+            <a:avLst/>
+          </a:prstGeom>
+          <a:solidFill>
+            <a:srgbClr val="CFFAFE"/>
+          </a:solidFill>
+          <a:ln w="12700">
+            <a:solidFill>
+              <a:srgbClr val="CFFAFE"/>
+            </a:solidFill>
+            <a:prstDash val="solid"/>
+          </a:ln>
+        </p:spPr>
+        <p:txBody>
+          <a:bodyPr/>
+          <a:lstStyle/>
+          <a:p>
+            <a:endParaRPr lang="en-US"/>
+          </a:p>
+        </p:txBody>
+      </p:sp>
+      <p:sp>
+        <p:nvSpPr>
+          <p:cNvPr id="9" name="Shape 6"/>
+          <p:cNvSpPr/>
+          <p:nvPr/>
+        </p:nvSpPr>
+        <p:spPr>
+          <a:xfrm>
+            <a:off x="3291840" y="3520440"/>
+            <a:ext cx="64008" cy="594360"/>
+          </a:xfrm>
+          <a:prstGeom prst="rect">
+            <a:avLst/>
+          </a:prstGeom>
+          <a:solidFill>
+            <a:srgbClr val="06B6D4"/>
+          </a:solidFill>
+          <a:ln w="12700">
+            <a:solidFill>
+              <a:srgbClr val="06B6D4"/>
+            </a:solidFill>
+            <a:prstDash val="solid"/>
+          </a:ln>
+        </p:spPr>
+        <p:txBody>
+          <a:bodyPr/>
+          <a:lstStyle/>
+          <a:p>
+            <a:endParaRPr lang="en-US"/>
+          </a:p>
+        </p:txBody>
+      </p:sp>
+      <p:sp>
+        <p:nvSpPr>
+          <p:cNvPr id="10" name="Text 7"/>
+          <p:cNvSpPr/>
+          <p:nvPr/>
+        </p:nvSpPr>
+        <p:spPr>
+          <a:xfrm>
+            <a:off x="3474720" y="3520440"/>
+            <a:ext cx="5212080" cy="594360"/>
+          </a:xfrm>
+          <a:prstGeom prst="rect">
+            <a:avLst/>
+          </a:prstGeom>
+          <a:noFill/>
+          <a:ln/>
+        </p:spPr>
+        <p:txBody>
+          <a:bodyPr wrap="square" lIns="0" tIns="0" rIns="0" bIns="0" rtlCol="0" anchor="ctr"/>
+          <a:lstStyle/>
+          <a:p>
+            <a:pPr marL="0" indent="0">
+              <a:buNone/>
+            </a:pPr>
+            <a:r>
+              <a:rPr lang="en-US" sz="1200" b="1" dirty="0">
+                <a:solidFill>
+                  <a:srgbClr val="0E7490"/>
+                </a:solidFill>
+                <a:latin typeface="Calibri" pitchFamily="34" charset="0"/>
+                <a:ea typeface="Calibri" pitchFamily="34" charset="-122"/>
+                <a:cs typeface="Calibri" pitchFamily="34" charset="-120"/>
+              </a:rPr>
+              <a:t>Coming this summer:  </a:t>
+            </a:r>
+            <a:r>
+              <a:rPr lang="en-US" sz="1200" i="1" dirty="0">
+                <a:solidFill>
+                  <a:srgbClr val="0E7490"/>
+                </a:solidFill>
+                <a:latin typeface="Calibri" pitchFamily="34" charset="0"/>
+                <a:ea typeface="Calibri" pitchFamily="34" charset="-122"/>
+                <a:cs typeface="Calibri" pitchFamily="34" charset="-120"/>
+              </a:rPr>
+              <a:t>an updated edition for .NET 10 and C# 14.</a:t>
+            </a:r>
+            <a:endParaRPr lang="en-US" sz="1200" dirty="0"/>
+          </a:p>
+        </p:txBody>
+      </p:sp>
+      <p:sp>
+        <p:nvSpPr>
+          <p:cNvPr id="11" name="Shape 8"/>
+          <p:cNvSpPr/>
+          <p:nvPr/>
+        </p:nvSpPr>
+        <p:spPr>
+          <a:xfrm>
+            <a:off x="3291840" y="4370832"/>
+            <a:ext cx="91440" cy="91440"/>
+          </a:xfrm>
+          <a:prstGeom prst="ellipse">
+            <a:avLst/>
+          </a:prstGeom>
+          <a:solidFill>
+            <a:srgbClr val="06B6D4"/>
+          </a:solidFill>
+          <a:ln w="12700">
+            <a:solidFill>
+              <a:srgbClr val="06B6D4"/>
+            </a:solidFill>
+            <a:prstDash val="solid"/>
+          </a:ln>
+        </p:spPr>
+        <p:txBody>
+          <a:bodyPr/>
+          <a:lstStyle/>
+          <a:p>
+            <a:endParaRPr lang="en-US"/>
+          </a:p>
+        </p:txBody>
+      </p:sp>
+      <p:sp>
+        <p:nvSpPr>
+          <p:cNvPr id="12" name="Text 9"/>
+          <p:cNvSpPr/>
+          <p:nvPr/>
+        </p:nvSpPr>
+        <p:spPr>
+          <a:xfrm>
+            <a:off x="3474720" y="4297680"/>
+            <a:ext cx="5212080" cy="274320"/>
+          </a:xfrm>
+          <a:prstGeom prst="rect">
+            <a:avLst/>
+          </a:prstGeom>
+          <a:noFill/>
+          <a:ln/>
+        </p:spPr>
+        <p:txBody>
+          <a:bodyPr wrap="square" lIns="0" tIns="0" rIns="0" bIns="0" rtlCol="0" anchor="ctr"/>
+          <a:lstStyle/>
+          <a:p>
+            <a:pPr marL="0" indent="0">
+              <a:buNone/>
+            </a:pPr>
+            <a:r>
+              <a:rPr lang="en-US" sz="1200" b="1" dirty="0">
+                <a:solidFill>
+                  <a:srgbClr val="0B1426"/>
+                </a:solidFill>
+                <a:latin typeface="Calibri" pitchFamily="34" charset="0"/>
+                <a:ea typeface="Calibri" pitchFamily="34" charset="-122"/>
+                <a:cs typeface="Calibri" pitchFamily="34" charset="-120"/>
+              </a:rPr>
+              <a:t>csharp-networking.com</a:t>
+            </a:r>
+            <a:endParaRPr lang="en-US" sz="1200" dirty="0"/>
+          </a:p>
+        </p:txBody>
+      </p:sp>
+      <p:sp>
+        <p:nvSpPr>
+          <p:cNvPr id="13" name="Shape 10"/>
+          <p:cNvSpPr/>
+          <p:nvPr/>
+        </p:nvSpPr>
+        <p:spPr>
+          <a:xfrm>
+            <a:off x="3291840" y="4645152"/>
+            <a:ext cx="91440" cy="91440"/>
+          </a:xfrm>
+          <a:prstGeom prst="ellipse">
+            <a:avLst/>
+          </a:prstGeom>
+          <a:solidFill>
+            <a:srgbClr val="06B6D4"/>
+          </a:solidFill>
+          <a:ln w="12700">
+            <a:solidFill>
+              <a:srgbClr val="06B6D4"/>
+            </a:solidFill>
+            <a:prstDash val="solid"/>
+          </a:ln>
+        </p:spPr>
+        <p:txBody>
+          <a:bodyPr/>
+          <a:lstStyle/>
+          <a:p>
+            <a:endParaRPr lang="en-US"/>
+          </a:p>
+        </p:txBody>
+      </p:sp>
+      <p:sp>
+        <p:nvSpPr>
+          <p:cNvPr id="14" name="Text 11"/>
+          <p:cNvSpPr/>
+          <p:nvPr/>
+        </p:nvSpPr>
+        <p:spPr>
+          <a:xfrm>
+            <a:off x="3474720" y="4572000"/>
+            <a:ext cx="5212080" cy="274320"/>
+          </a:xfrm>
+          <a:prstGeom prst="rect">
+            <a:avLst/>
+          </a:prstGeom>
+          <a:noFill/>
+          <a:ln/>
+        </p:spPr>
+        <p:txBody>
+          <a:bodyPr wrap="square" lIns="0" tIns="0" rIns="0" bIns="0" rtlCol="0" anchor="ctr"/>
+          <a:lstStyle/>
+          <a:p>
+            <a:pPr marL="0" indent="0">
+              <a:buNone/>
+            </a:pPr>
+            <a:r>
+              <a:rPr lang="en-US" sz="1200" i="1" dirty="0">
+                <a:solidFill>
+                  <a:srgbClr val="64748B"/>
+                </a:solidFill>
+                <a:latin typeface="Calibri" pitchFamily="34" charset="0"/>
+                <a:ea typeface="Calibri" pitchFamily="34" charset="-122"/>
+                <a:cs typeface="Calibri" pitchFamily="34" charset="-120"/>
+              </a:rPr>
+              <a:t>Also on LeanPub</a:t>
+            </a:r>
+            <a:endParaRPr lang="en-US" sz="1200" dirty="0"/>
+          </a:p>
+        </p:txBody>
+      </p:sp>
+      <p:sp>
+        <p:nvSpPr>
+          <p:cNvPr id="15" name="Text 12"/>
+          <p:cNvSpPr/>
+          <p:nvPr/>
+        </p:nvSpPr>
+        <p:spPr>
+          <a:xfrm>
+            <a:off x="457200" y="4800600"/>
+            <a:ext cx="4572000" cy="228600"/>
+          </a:xfrm>
+          <a:prstGeom prst="rect">
+            <a:avLst/>
+          </a:prstGeom>
+          <a:noFill/>
+          <a:ln/>
+        </p:spPr>
+        <p:txBody>
+          <a:bodyPr wrap="square" lIns="0" tIns="0" rIns="0" bIns="0" rtlCol="0" anchor="ctr"/>
+          <a:lstStyle/>
+          <a:p>
+            <a:pPr marL="0" indent="0">
+              <a:buNone/>
+            </a:pPr>
+            <a:r>
+              <a:rPr lang="en-US" sz="900" dirty="0">
+                <a:solidFill>
+                  <a:srgbClr val="64748B"/>
+                </a:solidFill>
+                <a:latin typeface="Calibri" pitchFamily="34" charset="0"/>
+                <a:ea typeface="Calibri" pitchFamily="34" charset="-122"/>
+                <a:cs typeface="Calibri" pitchFamily="34" charset="-120"/>
+              </a:rPr>
+              <a:t>QUIC &amp; HTTP/3 in .NET</a:t>
+            </a:r>
+            <a:endParaRPr lang="en-US" sz="900" dirty="0"/>
+          </a:p>
+        </p:txBody>
+      </p:sp>
+      <p:sp>
+        <p:nvSpPr>
+          <p:cNvPr id="16" name="Text 13"/>
+          <p:cNvSpPr/>
+          <p:nvPr/>
+        </p:nvSpPr>
+        <p:spPr>
+          <a:xfrm>
+            <a:off x="8229600" y="4800600"/>
+            <a:ext cx="457200" cy="228600"/>
+          </a:xfrm>
+          <a:prstGeom prst="rect">
+            <a:avLst/>
+          </a:prstGeom>
+          <a:noFill/>
+          <a:ln/>
+        </p:spPr>
+        <p:txBody>
+          <a:bodyPr wrap="square" lIns="0" tIns="0" rIns="0" bIns="0" rtlCol="0" anchor="ctr"/>
+          <a:lstStyle/>
+          <a:p>
+            <a:pPr marL="0" indent="0" algn="r">
+              <a:buNone/>
+            </a:pPr>
+            <a:r>
+              <a:rPr lang="en-US" sz="900" dirty="0">
+                <a:solidFill>
+                  <a:srgbClr val="64748B"/>
+                </a:solidFill>
+                <a:latin typeface="Calibri" pitchFamily="34" charset="0"/>
+                <a:ea typeface="Calibri" pitchFamily="34" charset="-122"/>
+                <a:cs typeface="Calibri" pitchFamily="34" charset="-120"/>
+              </a:rPr>
+              <a:t>2 / 27</a:t>
+            </a:r>
+            <a:endParaRPr lang="en-US" sz="900" dirty="0"/>
+          </a:p>
+        </p:txBody>
+      </p:sp>
+    </p:spTree>
+  </p:cSld>
+  <p:clrMapOvr>
+    <a:masterClrMapping/>
+  </p:clrMapOvr>
+</p:sld>
+</file>
+
+<file path=ppt/slides/slide4.xml><?xml version="1.0" encoding="utf-8"?>
+<p:sld xmlns:a="http://schemas.openxmlformats.org/drawingml/2006/main" xmlns:r="http://schemas.openxmlformats.org/officeDocument/2006/relationships" xmlns:p="http://schemas.openxmlformats.org/presentationml/2006/main">
   <p:cSld name="Slide 2">
     <p:bg>
       <p:bgPr>
@@ -19988,7 +20565,7 @@
 </p:sld>
 </file>
 
-<file path=ppt/slides/slide4.xml><?xml version="1.0" encoding="utf-8"?>
+<file path=ppt/slides/slide5.xml><?xml version="1.0" encoding="utf-8"?>
 <p:sld xmlns:a="http://schemas.openxmlformats.org/drawingml/2006/main" xmlns:r="http://schemas.openxmlformats.org/officeDocument/2006/relationships" xmlns:p="http://schemas.openxmlformats.org/presentationml/2006/main">
   <p:cSld name="Slide 3">
     <p:bg>
@@ -20909,583 +21486,6 @@
                 <a:cs typeface="Calibri" pitchFamily="34" charset="-120"/>
               </a:rPr>
               <a:t>3 / 26</a:t>
-            </a:r>
-            <a:endParaRPr lang="en-US" sz="900" dirty="0"/>
-          </a:p>
-        </p:txBody>
-      </p:sp>
-    </p:spTree>
-  </p:cSld>
-  <p:clrMapOvr>
-    <a:masterClrMapping/>
-  </p:clrMapOvr>
-</p:sld>
-</file>
-
-<file path=ppt/slides/slide5.xml><?xml version="1.0" encoding="utf-8"?>
-<p:sld xmlns:a="http://schemas.openxmlformats.org/drawingml/2006/main" xmlns:r="http://schemas.openxmlformats.org/officeDocument/2006/relationships" xmlns:p="http://schemas.openxmlformats.org/presentationml/2006/main">
-  <p:cSld>
-    <p:spTree>
-      <p:nvGrpSpPr>
-        <p:cNvPr id="1" name=""/>
-        <p:cNvGrpSpPr/>
-        <p:nvPr/>
-      </p:nvGrpSpPr>
-      <p:grpSpPr>
-        <a:xfrm>
-          <a:off x="0" y="0"/>
-          <a:ext cx="0" cy="0"/>
-          <a:chOff x="0" y="0"/>
-          <a:chExt cx="0" cy="0"/>
-        </a:xfrm>
-      </p:grpSpPr>
-      <p:sp>
-        <p:nvSpPr>
-          <p:cNvPr id="2" name="Text 0"/>
-          <p:cNvSpPr/>
-          <p:nvPr/>
-        </p:nvSpPr>
-        <p:spPr>
-          <a:xfrm>
-            <a:off x="457200" y="274320"/>
-            <a:ext cx="8229600" cy="256032"/>
-          </a:xfrm>
-          <a:prstGeom prst="rect">
-            <a:avLst/>
-          </a:prstGeom>
-          <a:noFill/>
-          <a:ln/>
-        </p:spPr>
-        <p:txBody>
-          <a:bodyPr wrap="square" lIns="0" tIns="0" rIns="0" bIns="0" rtlCol="0" anchor="ctr"/>
-          <a:lstStyle/>
-          <a:p>
-            <a:pPr marL="0" indent="0">
-              <a:buNone/>
-            </a:pPr>
-            <a:r>
-              <a:rPr lang="en-US" sz="1000" b="1" kern="0" spc="400" dirty="0">
-                <a:solidFill>
-                  <a:srgbClr val="06B6D4"/>
-                </a:solidFill>
-                <a:latin typeface="Calibri" pitchFamily="34" charset="0"/>
-                <a:ea typeface="Calibri" pitchFamily="34" charset="-122"/>
-                <a:cs typeface="Calibri" pitchFamily="34" charset="-120"/>
-              </a:rPr>
-              <a:t>FROM THE AUTHOR</a:t>
-            </a:r>
-            <a:endParaRPr lang="en-US" sz="1000" dirty="0"/>
-          </a:p>
-        </p:txBody>
-      </p:sp>
-      <p:sp>
-        <p:nvSpPr>
-          <p:cNvPr id="3" name="Text 1"/>
-          <p:cNvSpPr/>
-          <p:nvPr/>
-        </p:nvSpPr>
-        <p:spPr>
-          <a:xfrm>
-            <a:off x="457200" y="502920"/>
-            <a:ext cx="8229600" cy="640080"/>
-          </a:xfrm>
-          <a:prstGeom prst="rect">
-            <a:avLst/>
-          </a:prstGeom>
-          <a:noFill/>
-          <a:ln/>
-        </p:spPr>
-        <p:txBody>
-          <a:bodyPr wrap="square" lIns="0" tIns="0" rIns="0" bIns="0" rtlCol="0" anchor="ctr"/>
-          <a:lstStyle/>
-          <a:p>
-            <a:pPr marL="0" indent="0">
-              <a:buNone/>
-            </a:pPr>
-            <a:r>
-              <a:rPr lang="en-US" sz="3000" b="1" dirty="0">
-                <a:solidFill>
-                  <a:srgbClr val="0B1426"/>
-                </a:solidFill>
-                <a:latin typeface="Calibri" pitchFamily="34" charset="0"/>
-                <a:ea typeface="Calibri" pitchFamily="34" charset="-122"/>
-                <a:cs typeface="Calibri" pitchFamily="34" charset="-120"/>
-              </a:rPr>
-              <a:t>I wrote the book on this.</a:t>
-            </a:r>
-            <a:endParaRPr lang="en-US" sz="3000" dirty="0"/>
-          </a:p>
-        </p:txBody>
-      </p:sp>
-      <p:pic>
-        <p:nvPicPr>
-          <p:cNvPr id="4" name="Image 0" descr="cover-resized.jpeg"/>
-          <p:cNvPicPr>
-            <a:picLocks noChangeAspect="1"/>
-          </p:cNvPicPr>
-          <p:nvPr/>
-        </p:nvPicPr>
-        <p:blipFill>
-          <a:blip r:embed="rId3"/>
-          <a:srcRect/>
-          <a:stretch/>
-        </p:blipFill>
-        <p:spPr>
-          <a:xfrm>
-            <a:off x="640080" y="1325880"/>
-            <a:ext cx="2194560" cy="3291840"/>
-          </a:xfrm>
-          <a:prstGeom prst="rect">
-            <a:avLst/>
-          </a:prstGeom>
-        </p:spPr>
-      </p:pic>
-      <p:sp>
-        <p:nvSpPr>
-          <p:cNvPr id="5" name="Text 2"/>
-          <p:cNvSpPr/>
-          <p:nvPr/>
-        </p:nvSpPr>
-        <p:spPr>
-          <a:xfrm>
-            <a:off x="3291840" y="1325880"/>
-            <a:ext cx="5486400" cy="502920"/>
-          </a:xfrm>
-          <a:prstGeom prst="rect">
-            <a:avLst/>
-          </a:prstGeom>
-          <a:noFill/>
-          <a:ln/>
-        </p:spPr>
-        <p:txBody>
-          <a:bodyPr wrap="square" lIns="0" tIns="0" rIns="0" bIns="0" rtlCol="0" anchor="ctr"/>
-          <a:lstStyle/>
-          <a:p>
-            <a:pPr marL="0" indent="0">
-              <a:buNone/>
-            </a:pPr>
-            <a:r>
-              <a:rPr lang="en-US" sz="2600" b="1" dirty="0">
-                <a:solidFill>
-                  <a:srgbClr val="0B1426"/>
-                </a:solidFill>
-                <a:latin typeface="Calibri" pitchFamily="34" charset="0"/>
-                <a:ea typeface="Calibri" pitchFamily="34" charset="-122"/>
-                <a:cs typeface="Calibri" pitchFamily="34" charset="-120"/>
-              </a:rPr>
-              <a:t>Beyond Boundaries</a:t>
-            </a:r>
-            <a:endParaRPr lang="en-US" sz="2600" dirty="0"/>
-          </a:p>
-        </p:txBody>
-      </p:sp>
-      <p:sp>
-        <p:nvSpPr>
-          <p:cNvPr id="6" name="Text 3"/>
-          <p:cNvSpPr/>
-          <p:nvPr/>
-        </p:nvSpPr>
-        <p:spPr>
-          <a:xfrm>
-            <a:off x="3291840" y="1828800"/>
-            <a:ext cx="5486400" cy="365760"/>
-          </a:xfrm>
-          <a:prstGeom prst="rect">
-            <a:avLst/>
-          </a:prstGeom>
-          <a:noFill/>
-          <a:ln/>
-        </p:spPr>
-        <p:txBody>
-          <a:bodyPr wrap="square" lIns="0" tIns="0" rIns="0" bIns="0" rtlCol="0" anchor="ctr"/>
-          <a:lstStyle/>
-          <a:p>
-            <a:pPr marL="0" indent="0">
-              <a:buNone/>
-            </a:pPr>
-            <a:r>
-              <a:rPr lang="en-US" sz="1400" i="1" dirty="0">
-                <a:solidFill>
-                  <a:srgbClr val="0E7490"/>
-                </a:solidFill>
-                <a:latin typeface="Calibri" pitchFamily="34" charset="0"/>
-                <a:ea typeface="Calibri" pitchFamily="34" charset="-122"/>
-                <a:cs typeface="Calibri" pitchFamily="34" charset="-120"/>
-              </a:rPr>
-              <a:t>Networking Programming with C# 12 and .NET 8</a:t>
-            </a:r>
-            <a:endParaRPr lang="en-US" sz="1400" dirty="0"/>
-          </a:p>
-        </p:txBody>
-      </p:sp>
-      <p:sp>
-        <p:nvSpPr>
-          <p:cNvPr id="7" name="Text 4"/>
-          <p:cNvSpPr/>
-          <p:nvPr/>
-        </p:nvSpPr>
-        <p:spPr>
-          <a:xfrm>
-            <a:off x="3291840" y="2331720"/>
-            <a:ext cx="5486400" cy="1188720"/>
-          </a:xfrm>
-          <a:prstGeom prst="rect">
-            <a:avLst/>
-          </a:prstGeom>
-          <a:noFill/>
-          <a:ln/>
-        </p:spPr>
-        <p:txBody>
-          <a:bodyPr wrap="square" lIns="0" tIns="0" rIns="0" bIns="0" rtlCol="0" anchor="ctr"/>
-          <a:lstStyle/>
-          <a:p>
-            <a:pPr marL="0" indent="0">
-              <a:buNone/>
-            </a:pPr>
-            <a:r>
-              <a:rPr lang="en-US" sz="1200" dirty="0">
-                <a:solidFill>
-                  <a:srgbClr val="64748B"/>
-                </a:solidFill>
-                <a:latin typeface="Calibri" pitchFamily="34" charset="0"/>
-                <a:ea typeface="Calibri" pitchFamily="34" charset="-122"/>
-                <a:cs typeface="Calibri" pitchFamily="34" charset="-120"/>
-              </a:rPr>
-              <a:t>A full tour of network programming in modern .NET — sockets, HTTP, WebSockets, gRPC, SignalR, MQTT, and the complete QUIC and HTTP/3 story behind today's talk.</a:t>
-            </a:r>
-            <a:endParaRPr lang="en-US" sz="1200" dirty="0"/>
-          </a:p>
-        </p:txBody>
-      </p:sp>
-      <p:sp>
-        <p:nvSpPr>
-          <p:cNvPr id="8" name="Shape 5"/>
-          <p:cNvSpPr/>
-          <p:nvPr/>
-        </p:nvSpPr>
-        <p:spPr>
-          <a:xfrm>
-            <a:off x="3291840" y="3520440"/>
-            <a:ext cx="5486400" cy="594360"/>
-          </a:xfrm>
-          <a:prstGeom prst="rect">
-            <a:avLst/>
-          </a:prstGeom>
-          <a:solidFill>
-            <a:srgbClr val="CFFAFE"/>
-          </a:solidFill>
-          <a:ln w="12700">
-            <a:solidFill>
-              <a:srgbClr val="CFFAFE"/>
-            </a:solidFill>
-            <a:prstDash val="solid"/>
-          </a:ln>
-        </p:spPr>
-        <p:txBody>
-          <a:bodyPr/>
-          <a:lstStyle/>
-          <a:p>
-            <a:endParaRPr lang="en-US"/>
-          </a:p>
-        </p:txBody>
-      </p:sp>
-      <p:sp>
-        <p:nvSpPr>
-          <p:cNvPr id="9" name="Shape 6"/>
-          <p:cNvSpPr/>
-          <p:nvPr/>
-        </p:nvSpPr>
-        <p:spPr>
-          <a:xfrm>
-            <a:off x="3291840" y="3520440"/>
-            <a:ext cx="64008" cy="594360"/>
-          </a:xfrm>
-          <a:prstGeom prst="rect">
-            <a:avLst/>
-          </a:prstGeom>
-          <a:solidFill>
-            <a:srgbClr val="06B6D4"/>
-          </a:solidFill>
-          <a:ln w="12700">
-            <a:solidFill>
-              <a:srgbClr val="06B6D4"/>
-            </a:solidFill>
-            <a:prstDash val="solid"/>
-          </a:ln>
-        </p:spPr>
-        <p:txBody>
-          <a:bodyPr/>
-          <a:lstStyle/>
-          <a:p>
-            <a:endParaRPr lang="en-US"/>
-          </a:p>
-        </p:txBody>
-      </p:sp>
-      <p:sp>
-        <p:nvSpPr>
-          <p:cNvPr id="10" name="Text 7"/>
-          <p:cNvSpPr/>
-          <p:nvPr/>
-        </p:nvSpPr>
-        <p:spPr>
-          <a:xfrm>
-            <a:off x="3474720" y="3520440"/>
-            <a:ext cx="5212080" cy="594360"/>
-          </a:xfrm>
-          <a:prstGeom prst="rect">
-            <a:avLst/>
-          </a:prstGeom>
-          <a:noFill/>
-          <a:ln/>
-        </p:spPr>
-        <p:txBody>
-          <a:bodyPr wrap="square" lIns="0" tIns="0" rIns="0" bIns="0" rtlCol="0" anchor="ctr"/>
-          <a:lstStyle/>
-          <a:p>
-            <a:pPr marL="0" indent="0">
-              <a:buNone/>
-            </a:pPr>
-            <a:r>
-              <a:rPr lang="en-US" sz="1200" b="1" dirty="0">
-                <a:solidFill>
-                  <a:srgbClr val="0E7490"/>
-                </a:solidFill>
-                <a:latin typeface="Calibri" pitchFamily="34" charset="0"/>
-                <a:ea typeface="Calibri" pitchFamily="34" charset="-122"/>
-                <a:cs typeface="Calibri" pitchFamily="34" charset="-120"/>
-              </a:rPr>
-              <a:t>Coming this summer:  </a:t>
-            </a:r>
-            <a:r>
-              <a:rPr lang="en-US" sz="1200" i="1" dirty="0">
-                <a:solidFill>
-                  <a:srgbClr val="0E7490"/>
-                </a:solidFill>
-                <a:latin typeface="Calibri" pitchFamily="34" charset="0"/>
-                <a:ea typeface="Calibri" pitchFamily="34" charset="-122"/>
-                <a:cs typeface="Calibri" pitchFamily="34" charset="-120"/>
-              </a:rPr>
-              <a:t>an updated edition for .NET 10 and C# 14.</a:t>
-            </a:r>
-            <a:endParaRPr lang="en-US" sz="1200" dirty="0"/>
-          </a:p>
-        </p:txBody>
-      </p:sp>
-      <p:sp>
-        <p:nvSpPr>
-          <p:cNvPr id="11" name="Shape 8"/>
-          <p:cNvSpPr/>
-          <p:nvPr/>
-        </p:nvSpPr>
-        <p:spPr>
-          <a:xfrm>
-            <a:off x="3291840" y="4370832"/>
-            <a:ext cx="91440" cy="91440"/>
-          </a:xfrm>
-          <a:prstGeom prst="ellipse">
-            <a:avLst/>
-          </a:prstGeom>
-          <a:solidFill>
-            <a:srgbClr val="06B6D4"/>
-          </a:solidFill>
-          <a:ln w="12700">
-            <a:solidFill>
-              <a:srgbClr val="06B6D4"/>
-            </a:solidFill>
-            <a:prstDash val="solid"/>
-          </a:ln>
-        </p:spPr>
-        <p:txBody>
-          <a:bodyPr/>
-          <a:lstStyle/>
-          <a:p>
-            <a:endParaRPr lang="en-US"/>
-          </a:p>
-        </p:txBody>
-      </p:sp>
-      <p:sp>
-        <p:nvSpPr>
-          <p:cNvPr id="12" name="Text 9"/>
-          <p:cNvSpPr/>
-          <p:nvPr/>
-        </p:nvSpPr>
-        <p:spPr>
-          <a:xfrm>
-            <a:off x="3474720" y="4297680"/>
-            <a:ext cx="5212080" cy="274320"/>
-          </a:xfrm>
-          <a:prstGeom prst="rect">
-            <a:avLst/>
-          </a:prstGeom>
-          <a:noFill/>
-          <a:ln/>
-        </p:spPr>
-        <p:txBody>
-          <a:bodyPr wrap="square" lIns="0" tIns="0" rIns="0" bIns="0" rtlCol="0" anchor="ctr"/>
-          <a:lstStyle/>
-          <a:p>
-            <a:pPr marL="0" indent="0">
-              <a:buNone/>
-            </a:pPr>
-            <a:r>
-              <a:rPr lang="en-US" sz="1200" b="1" dirty="0">
-                <a:solidFill>
-                  <a:srgbClr val="0B1426"/>
-                </a:solidFill>
-                <a:latin typeface="Calibri" pitchFamily="34" charset="0"/>
-                <a:ea typeface="Calibri" pitchFamily="34" charset="-122"/>
-                <a:cs typeface="Calibri" pitchFamily="34" charset="-120"/>
-              </a:rPr>
-              <a:t>csharp-networking.com</a:t>
-            </a:r>
-            <a:endParaRPr lang="en-US" sz="1200" dirty="0"/>
-          </a:p>
-        </p:txBody>
-      </p:sp>
-      <p:sp>
-        <p:nvSpPr>
-          <p:cNvPr id="13" name="Shape 10"/>
-          <p:cNvSpPr/>
-          <p:nvPr/>
-        </p:nvSpPr>
-        <p:spPr>
-          <a:xfrm>
-            <a:off x="3291840" y="4645152"/>
-            <a:ext cx="91440" cy="91440"/>
-          </a:xfrm>
-          <a:prstGeom prst="ellipse">
-            <a:avLst/>
-          </a:prstGeom>
-          <a:solidFill>
-            <a:srgbClr val="06B6D4"/>
-          </a:solidFill>
-          <a:ln w="12700">
-            <a:solidFill>
-              <a:srgbClr val="06B6D4"/>
-            </a:solidFill>
-            <a:prstDash val="solid"/>
-          </a:ln>
-        </p:spPr>
-        <p:txBody>
-          <a:bodyPr/>
-          <a:lstStyle/>
-          <a:p>
-            <a:endParaRPr lang="en-US"/>
-          </a:p>
-        </p:txBody>
-      </p:sp>
-      <p:sp>
-        <p:nvSpPr>
-          <p:cNvPr id="14" name="Text 11"/>
-          <p:cNvSpPr/>
-          <p:nvPr/>
-        </p:nvSpPr>
-        <p:spPr>
-          <a:xfrm>
-            <a:off x="3474720" y="4572000"/>
-            <a:ext cx="5212080" cy="274320"/>
-          </a:xfrm>
-          <a:prstGeom prst="rect">
-            <a:avLst/>
-          </a:prstGeom>
-          <a:noFill/>
-          <a:ln/>
-        </p:spPr>
-        <p:txBody>
-          <a:bodyPr wrap="square" lIns="0" tIns="0" rIns="0" bIns="0" rtlCol="0" anchor="ctr"/>
-          <a:lstStyle/>
-          <a:p>
-            <a:pPr marL="0" indent="0">
-              <a:buNone/>
-            </a:pPr>
-            <a:r>
-              <a:rPr lang="en-US" sz="1200" i="1" dirty="0">
-                <a:solidFill>
-                  <a:srgbClr val="64748B"/>
-                </a:solidFill>
-                <a:latin typeface="Calibri" pitchFamily="34" charset="0"/>
-                <a:ea typeface="Calibri" pitchFamily="34" charset="-122"/>
-                <a:cs typeface="Calibri" pitchFamily="34" charset="-120"/>
-              </a:rPr>
-              <a:t>Also on LeanPub</a:t>
-            </a:r>
-            <a:endParaRPr lang="en-US" sz="1200" dirty="0"/>
-          </a:p>
-        </p:txBody>
-      </p:sp>
-      <p:sp>
-        <p:nvSpPr>
-          <p:cNvPr id="15" name="Text 12"/>
-          <p:cNvSpPr/>
-          <p:nvPr/>
-        </p:nvSpPr>
-        <p:spPr>
-          <a:xfrm>
-            <a:off x="457200" y="4800600"/>
-            <a:ext cx="4572000" cy="228600"/>
-          </a:xfrm>
-          <a:prstGeom prst="rect">
-            <a:avLst/>
-          </a:prstGeom>
-          <a:noFill/>
-          <a:ln/>
-        </p:spPr>
-        <p:txBody>
-          <a:bodyPr wrap="square" lIns="0" tIns="0" rIns="0" bIns="0" rtlCol="0" anchor="ctr"/>
-          <a:lstStyle/>
-          <a:p>
-            <a:pPr marL="0" indent="0">
-              <a:buNone/>
-            </a:pPr>
-            <a:r>
-              <a:rPr lang="en-US" sz="900" dirty="0">
-                <a:solidFill>
-                  <a:srgbClr val="64748B"/>
-                </a:solidFill>
-                <a:latin typeface="Calibri" pitchFamily="34" charset="0"/>
-                <a:ea typeface="Calibri" pitchFamily="34" charset="-122"/>
-                <a:cs typeface="Calibri" pitchFamily="34" charset="-120"/>
-              </a:rPr>
-              <a:t>QUIC &amp; HTTP/3 in .NET</a:t>
-            </a:r>
-            <a:endParaRPr lang="en-US" sz="900" dirty="0"/>
-          </a:p>
-        </p:txBody>
-      </p:sp>
-      <p:sp>
-        <p:nvSpPr>
-          <p:cNvPr id="16" name="Text 13"/>
-          <p:cNvSpPr/>
-          <p:nvPr/>
-        </p:nvSpPr>
-        <p:spPr>
-          <a:xfrm>
-            <a:off x="8229600" y="4800600"/>
-            <a:ext cx="457200" cy="228600"/>
-          </a:xfrm>
-          <a:prstGeom prst="rect">
-            <a:avLst/>
-          </a:prstGeom>
-          <a:noFill/>
-          <a:ln/>
-        </p:spPr>
-        <p:txBody>
-          <a:bodyPr wrap="square" lIns="0" tIns="0" rIns="0" bIns="0" rtlCol="0" anchor="ctr"/>
-          <a:lstStyle/>
-          <a:p>
-            <a:pPr marL="0" indent="0" algn="r">
-              <a:buNone/>
-            </a:pPr>
-            <a:r>
-              <a:rPr lang="en-US" sz="900" dirty="0">
-                <a:solidFill>
-                  <a:srgbClr val="64748B"/>
-                </a:solidFill>
-                <a:latin typeface="Calibri" pitchFamily="34" charset="0"/>
-                <a:ea typeface="Calibri" pitchFamily="34" charset="-122"/>
-                <a:cs typeface="Calibri" pitchFamily="34" charset="-120"/>
-              </a:rPr>
-              <a:t>2 / 27</a:t>
             </a:r>
             <a:endParaRPr lang="en-US" sz="900" dirty="0"/>
           </a:p>

--- a/QUIC-HTTP3-in-DotNET.pptx
+++ b/QUIC-HTTP3-in-DotNET.pptx
@@ -7812,7 +7812,7 @@
                 <a:ea typeface="Calibri" pitchFamily="34" charset="-122"/>
                 <a:cs typeface="Calibri" pitchFamily="34" charset="-120"/>
               </a:rPr>
-              <a:t>QUIC in .NET 8 and 10</a:t>
+              <a:t>QUIC in .NET 10</a:t>
             </a:r>
             <a:endParaRPr lang="en-US" sz="4400" dirty="0"/>
           </a:p>
@@ -21688,8 +21688,8 @@
         </p:nvSpPr>
         <p:spPr>
           <a:xfrm>
-            <a:off x="457200" y="3337560"/>
-            <a:ext cx="4754880" cy="640080"/>
+            <a:off x="457199" y="3337560"/>
+            <a:ext cx="4993105" cy="640080"/>
           </a:xfrm>
           <a:prstGeom prst="rect">
             <a:avLst/>
@@ -21713,7 +21713,7 @@
                 <a:ea typeface="Calibri" pitchFamily="34" charset="-122"/>
                 <a:cs typeface="Calibri" pitchFamily="34" charset="-120"/>
               </a:rPr>
-              <a:t>Adopted by Google, Cloudflare, and Microsoft — and shipping in .NET 8 and 10 today.</a:t>
+              <a:t>Adopted by Google, Cloudflare, and Microsoft — and shipping in .NET 10 today.</a:t>
             </a:r>
             <a:endParaRPr lang="en-US" sz="1200" dirty="0"/>
           </a:p>
